--- a/curso/pptx/S76.pptx
+++ b/curso/pptx/S76.pptx
@@ -3903,7 +3903,7 @@
                 </a:solidFill>
                 <a:latin typeface="Nunito Sans"/>
               </a:rPr>
-              <a:t>Postura de Leire: «Quiero el ordenador ya». Postura de Aitor: «Lo quiero yo». Su madre les pregunta a cada uno: «¿Para qué lo necesitas?».</a:t>
+              <a:t>Postura de la chica: «Quiero el ordenador ya». Postura de su hermano: «Lo quiero yo». Su madre les pregunta a cada uno: «¿Para qué lo necesitas?».</a:t>
             </a:r>
           </a:p>
         </p:txBody>
@@ -3951,7 +3951,7 @@
                 </a:solidFill>
                 <a:latin typeface="Nunito Sans"/>
               </a:rPr>
-              <a:t>Interés de Leire: entregar un trabajo antes de las 20:00.</a:t>
+              <a:t>Interés de la chica: entregar un trabajo antes de las 20:00.</a:t>
             </a:r>
           </a:p>
           <a:p>
@@ -3976,7 +3976,7 @@
                 </a:solidFill>
                 <a:latin typeface="Nunito Sans"/>
               </a:rPr>
-              <a:t>Interés de Aitor: jugar online con su cuadrilla, que queda a las 21:00.</a:t>
+              <a:t>Interés de su hermano: jugar online con su cuadrilla, que queda a las 21:00.</a:t>
             </a:r>
           </a:p>
           <a:p>
@@ -4026,7 +4026,7 @@
                 </a:solidFill>
                 <a:latin typeface="Nunito Sans"/>
               </a:rPr>
-              <a:t>Conclusión: Leire lo usa hasta las 20:00 y Aitor después. Mirar el interés permite colaborar.</a:t>
+              <a:t>Conclusión: la chica lo usa hasta las 20:00 y su hermano después. Mirar el interés permite colaborar.</a:t>
             </a:r>
           </a:p>
         </p:txBody>
@@ -4212,7 +4212,7 @@
                 </a:solidFill>
                 <a:latin typeface="Nunito Sans"/>
               </a:rPr>
-              <a:t>Excursión a Urdaibai. Chen quiere ir en la ventanilla. A Maialen le da igual, pero Chen se marea si no mira fuera.</a:t>
+              <a:t>Excursión a Urdaibai. Un chico quiere ir en la ventanilla. A una compañera le da igual, pero él se marea si no mira fuera.</a:t>
             </a:r>
           </a:p>
         </p:txBody>
@@ -4260,7 +4260,7 @@
                 </a:solidFill>
                 <a:latin typeface="Nunito Sans"/>
               </a:rPr>
-              <a:t>¿Qué actitud tiene sentido para Maialen? Ceder.</a:t>
+              <a:t>¿Qué actitud tiene sentido para la compañera? Ceder.</a:t>
             </a:r>
           </a:p>
           <a:p>
@@ -4285,7 +4285,7 @@
                 </a:solidFill>
                 <a:latin typeface="Nunito Sans"/>
               </a:rPr>
-              <a:t>¿Por qué ceder? A ella casi no le importa y a Chen le importa mucho.</a:t>
+              <a:t>¿Por qué ceder? A ella casi no le importa y a él le importa mucho.</a:t>
             </a:r>
           </a:p>
           <a:p>
@@ -4521,7 +4521,7 @@
                 </a:solidFill>
                 <a:latin typeface="Nunito Sans"/>
               </a:rPr>
-              <a:t>Omar presume: «En mi cuadrilla nunca hay conflictos». Pero Naiara siempre cede, y Kevin se calla cuando algo no le gusta.</a:t>
+              <a:t>Un chico presume: «En mi cuadrilla nunca hay conflictos». Pero una del grupo siempre cede, y otro se calla cuando algo no le gusta.</a:t>
             </a:r>
           </a:p>
         </p:txBody>
@@ -4619,7 +4619,7 @@
                 </a:solidFill>
                 <a:latin typeface="Nunito Sans"/>
               </a:rPr>
-              <a:t>Pero Naiara siempre cede y Kevin siempre evita. Los conflictos están, solo que escondidos.</a:t>
+              <a:t>Pero una siempre cede y otro siempre evita. Los conflictos están, solo que escondidos.</a:t>
             </a:r>
           </a:p>
           <a:p>
@@ -6229,7 +6229,7 @@
                 </a:solidFill>
                 <a:latin typeface="Nunito Sans"/>
               </a:rPr>
-              <a:t>Leire y su hermano Aitor quieren el ordenador de casa a la misma hora. Cada uno grita: «¡Lo pedí yo primero!». Nadie cede.</a:t>
+              <a:t>Una chica y su hermano quieren el ordenador de casa a la misma hora. Cada uno grita: «¡Lo pedí yo primero!». Nadie cede.</a:t>
             </a:r>
           </a:p>
         </p:txBody>

--- a/curso/pptx/S76.pptx
+++ b/curso/pptx/S76.pptx
@@ -22,6 +22,7 @@
     <p:sldId id="270" r:id="rId22"/>
     <p:sldId id="271" r:id="rId23"/>
     <p:sldId id="272" r:id="rId24"/>
+    <p:sldId id="273" r:id="rId25"/>
   </p:sldIdLst>
   <p:sldSz cx="12192000" cy="6858000" type="screen4x3"/>
   <p:notesSz cx="6858000" cy="9144000"/>
@@ -3535,7 +3536,7 @@
                 </a:solidFill>
                 <a:latin typeface="Nunito Sans"/>
               </a:rPr>
-              <a:t>PENSAMIENTO CRÍTICO · SESIÓN 76 · UNIDAD 16 · EMOCIONES Y CONFLICTOS</a:t>
+              <a:t>PENSAMIENTO CRÍTICO · SESIÓN 76 · UNIDAD 16 · AMISTAD, AMOR Y FAMILIAS</a:t>
             </a:r>
           </a:p>
         </p:txBody>
@@ -3574,7 +3575,7 @@
                 </a:solidFill>
                 <a:latin typeface="Fredoka"/>
               </a:rPr>
-              <a:t>El conflicto no es una pelea</a:t>
+              <a:t>Los mitos del amor romántico</a:t>
             </a:r>
           </a:p>
         </p:txBody>
@@ -3613,7 +3614,7 @@
                 </a:solidFill>
                 <a:latin typeface="Nunito Sans"/>
               </a:rPr>
-              <a:t>Un conflicto es un choque de intereses o necesidades; se puede afrontar de varias maneras, y ayuda distinguir lo que pido de lo que necesito.</a:t>
+              <a:t>Los mitos del amor romántico son creencias falsas o exageradas sobre el amor, como que los celos prueban amor; pueden disfrazar el control de cariño.</a:t>
             </a:r>
           </a:p>
         </p:txBody>
@@ -3821,7 +3822,7 @@
                 </a:solidFill>
                 <a:latin typeface="Fredoka"/>
               </a:rPr>
-              <a:t>Caso 1 · El ordenador de casa</a:t>
+              <a:t>Caso 1 · «Mándame la ubicación»</a:t>
             </a:r>
           </a:p>
         </p:txBody>
@@ -3903,7 +3904,7 @@
                 </a:solidFill>
                 <a:latin typeface="Nunito Sans"/>
               </a:rPr>
-              <a:t>Postura de la chica: «Quiero el ordenador ya». Postura de su hermano: «Lo quiero yo». Su madre les pregunta a cada uno: «¿Para qué lo necesitas?».</a:t>
+              <a:t>Un chico escribe a su novia cada hora: «¿Dónde estás? ¿Con quién? Mándame la ubicación». Y añade: «Es porque me preocupo por ti». (Ejemplo inventado.)</a:t>
             </a:r>
           </a:p>
         </p:txBody>
@@ -3951,7 +3952,7 @@
                 </a:solidFill>
                 <a:latin typeface="Nunito Sans"/>
               </a:rPr>
-              <a:t>Interés de la chica: entregar un trabajo antes de las 20:00.</a:t>
+              <a:t>¿Qué dice el chico? Que es preocupación, cariño.</a:t>
             </a:r>
           </a:p>
           <a:p>
@@ -3976,7 +3977,7 @@
                 </a:solidFill>
                 <a:latin typeface="Nunito Sans"/>
               </a:rPr>
-              <a:t>Interés de su hermano: jugar online con su cuadrilla, que queda a las 21:00.</a:t>
+              <a:t>¿Qué hace? Vigila dónde está ella y con quién, a todas horas.</a:t>
             </a:r>
           </a:p>
           <a:p>
@@ -4001,7 +4002,7 @@
                 </a:solidFill>
                 <a:latin typeface="Nunito Sans"/>
               </a:rPr>
-              <a:t>Las posturas chocaban; los intereses, no: caben los dos en la tarde.</a:t>
+              <a:t>¿Cómo lo sé? Miro los hechos, no la etiqueta. Preocuparse alguna vez no es vigilar cada hora.</a:t>
             </a:r>
           </a:p>
           <a:p>
@@ -4026,7 +4027,25 @@
                 </a:solidFill>
                 <a:latin typeface="Nunito Sans"/>
               </a:rPr>
-              <a:t>Conclusión: la chica lo usa hasta las 20:00 y su hermano después. Mirar el interés permite colaborar.</a:t>
+              <a:t>Conclusión: es </a:t>
+            </a:r>
+            <a:r>
+              <a:rPr sz="2400" b="1">
+                <a:solidFill>
+                  <a:srgbClr val="1F2A44"/>
+                </a:solidFill>
+                <a:latin typeface="Nunito Sans"/>
+              </a:rPr>
+              <a:t>control</a:t>
+            </a:r>
+            <a:r>
+              <a:rPr sz="2400" b="0">
+                <a:solidFill>
+                  <a:srgbClr val="1F2A44"/>
+                </a:solidFill>
+                <a:latin typeface="Nunito Sans"/>
+              </a:rPr>
+              <a:t> disfrazado de cariño. Llamarlo amor no lo convierte en amor.</a:t>
             </a:r>
           </a:p>
         </p:txBody>
@@ -4130,7 +4149,7 @@
                 </a:solidFill>
                 <a:latin typeface="Fredoka"/>
               </a:rPr>
-              <a:t>Caso 2 · El asiento del autobús</a:t>
+              <a:t>Caso 2 · Sentir celos y usar los celos</a:t>
             </a:r>
           </a:p>
         </p:txBody>
@@ -4212,7 +4231,7 @@
                 </a:solidFill>
                 <a:latin typeface="Nunito Sans"/>
               </a:rPr>
-              <a:t>Excursión a Urdaibai. Un chico quiere ir en la ventanilla. A una compañera le da igual, pero él se marea si no mira fuera.</a:t>
+              <a:t>Una chica ve que su novio se ríe mucho con una compañera. Siente celos. (Ejemplo inventado.)</a:t>
             </a:r>
           </a:p>
         </p:txBody>
@@ -4260,7 +4279,7 @@
                 </a:solidFill>
                 <a:latin typeface="Nunito Sans"/>
               </a:rPr>
-              <a:t>¿Qué actitud tiene sentido para la compañera? Ceder.</a:t>
+              <a:t>Sentir celos alguna vez es humano: es una emoción, no un delito.</a:t>
             </a:r>
           </a:p>
           <a:p>
@@ -4285,7 +4304,7 @@
                 </a:solidFill>
                 <a:latin typeface="Nunito Sans"/>
               </a:rPr>
-              <a:t>¿Por qué ceder? A ella casi no le importa y a él le importa mucho.</a:t>
+              <a:t>Lo que ella haga con ellos es otra cosa: puede hablarlo con calma, o vigilar y prohibir.</a:t>
             </a:r>
           </a:p>
           <a:p>
@@ -4310,7 +4329,25 @@
                 </a:solidFill>
                 <a:latin typeface="Nunito Sans"/>
               </a:rPr>
-              <a:t>Ceder no es perder: es elegir bien cuando el tema es pequeño para ti.</a:t>
+              <a:t>El mito es creer que los celos </a:t>
+            </a:r>
+            <a:r>
+              <a:rPr sz="2400" b="1">
+                <a:solidFill>
+                  <a:srgbClr val="1F2A44"/>
+                </a:solidFill>
+                <a:latin typeface="Nunito Sans"/>
+              </a:rPr>
+              <a:t>prueban</a:t>
+            </a:r>
+            <a:r>
+              <a:rPr sz="2400" b="0">
+                <a:solidFill>
+                  <a:srgbClr val="1F2A44"/>
+                </a:solidFill>
+                <a:latin typeface="Nunito Sans"/>
+              </a:rPr>
+              <a:t> amor y dan derecho a controlar.</a:t>
             </a:r>
           </a:p>
           <a:p>
@@ -4335,7 +4372,7 @@
                 </a:solidFill>
                 <a:latin typeface="Nunito Sans"/>
               </a:rPr>
-              <a:t>Conclusión: ninguna actitud es siempre la buena. La buena depende de cuánto le importa a cada uno.</a:t>
+              <a:t>Conclusión: la emoción no se elige; lo que hago con ella, sí.</a:t>
             </a:r>
           </a:p>
         </p:txBody>
@@ -4349,6 +4386,497 @@
 </file>
 
 <file path=ppt/slides/slide13.xml><?xml version="1.0" encoding="utf-8"?>
+<p:sld xmlns:a="http://schemas.openxmlformats.org/drawingml/2006/main" xmlns:p="http://schemas.openxmlformats.org/presentationml/2006/main" xmlns:r="http://schemas.openxmlformats.org/officeDocument/2006/relationships">
+  <p:cSld>
+    <p:bg>
+      <p:bgPr>
+        <a:solidFill>
+          <a:srgbClr val="FBF7EF"/>
+        </a:solidFill>
+        <a:effectLst/>
+      </p:bgPr>
+    </p:bg>
+    <p:spTree>
+      <p:nvGrpSpPr>
+        <p:cNvPr id="1" name=""/>
+        <p:cNvGrpSpPr/>
+        <p:nvPr/>
+      </p:nvGrpSpPr>
+      <p:grpSpPr/>
+      <p:sp>
+        <p:nvSpPr>
+          <p:cNvPr id="2" name="TextBox 1"/>
+          <p:cNvSpPr txBox="1"/>
+          <p:nvPr/>
+        </p:nvSpPr>
+        <p:spPr>
+          <a:xfrm>
+            <a:off x="640000" y="380000"/>
+            <a:ext cx="10912000" cy="420000"/>
+          </a:xfrm>
+          <a:prstGeom prst="rect">
+            <a:avLst/>
+          </a:prstGeom>
+          <a:noFill/>
+        </p:spPr>
+        <p:txBody>
+          <a:bodyPr wrap="square">
+            <a:spAutoFit/>
+          </a:bodyPr>
+          <a:lstStyle/>
+          <a:p>
+            <a:pPr>
+              <a:spcAft>
+                <a:spcPts val="630"/>
+              </a:spcAft>
+            </a:pPr>
+            <a:r>
+              <a:rPr sz="1400" b="1">
+                <a:solidFill>
+                  <a:srgbClr val="E8793A"/>
+                </a:solidFill>
+                <a:latin typeface="Nunito Sans"/>
+              </a:rPr>
+              <a:t>BLOQUE 2 · CASOS RESUELTOS</a:t>
+            </a:r>
+          </a:p>
+        </p:txBody>
+      </p:sp>
+      <p:sp>
+        <p:nvSpPr>
+          <p:cNvPr id="3" name="TextBox 2"/>
+          <p:cNvSpPr txBox="1"/>
+          <p:nvPr/>
+        </p:nvSpPr>
+        <p:spPr>
+          <a:xfrm>
+            <a:off x="640000" y="760000"/>
+            <a:ext cx="10912000" cy="800000"/>
+          </a:xfrm>
+          <a:prstGeom prst="rect">
+            <a:avLst/>
+          </a:prstGeom>
+          <a:noFill/>
+        </p:spPr>
+        <p:txBody>
+          <a:bodyPr wrap="square">
+            <a:spAutoFit/>
+          </a:bodyPr>
+          <a:lstStyle/>
+          <a:p>
+            <a:pPr>
+              <a:spcAft>
+                <a:spcPts val="1710"/>
+              </a:spcAft>
+            </a:pPr>
+            <a:r>
+              <a:rPr sz="3800" b="1">
+                <a:solidFill>
+                  <a:srgbClr val="1F2A44"/>
+                </a:solidFill>
+                <a:latin typeface="Fredoka"/>
+              </a:rPr>
+              <a:t>¿Control o relación sana?</a:t>
+            </a:r>
+          </a:p>
+        </p:txBody>
+      </p:sp>
+      <p:sp>
+        <p:nvSpPr>
+          <p:cNvPr id="4" name="Rectangle 3"/>
+          <p:cNvSpPr/>
+          <p:nvPr/>
+        </p:nvSpPr>
+        <p:spPr>
+          <a:xfrm>
+            <a:off x="640000" y="1650000"/>
+            <a:ext cx="5306000" cy="4400000"/>
+          </a:xfrm>
+          <a:prstGeom prst="rect">
+            <a:avLst/>
+          </a:prstGeom>
+          <a:solidFill>
+            <a:srgbClr val="FBE3D2"/>
+          </a:solidFill>
+          <a:ln>
+            <a:noFill/>
+          </a:ln>
+        </p:spPr>
+        <p:style>
+          <a:lnRef idx="1">
+            <a:schemeClr val="accent1"/>
+          </a:lnRef>
+          <a:fillRef idx="3">
+            <a:schemeClr val="accent1"/>
+          </a:fillRef>
+          <a:effectRef idx="2">
+            <a:schemeClr val="accent1"/>
+          </a:effectRef>
+          <a:fontRef idx="minor">
+            <a:schemeClr val="lt1"/>
+          </a:fontRef>
+        </p:style>
+        <p:txBody>
+          <a:bodyPr rtlCol="0" anchor="ctr"/>
+          <a:lstStyle/>
+          <a:p>
+            <a:pPr algn="ctr"/>
+          </a:p>
+        </p:txBody>
+      </p:sp>
+      <p:sp>
+        <p:nvSpPr>
+          <p:cNvPr id="5" name="TextBox 4"/>
+          <p:cNvSpPr txBox="1"/>
+          <p:nvPr/>
+        </p:nvSpPr>
+        <p:spPr>
+          <a:xfrm>
+            <a:off x="840000" y="1750000"/>
+            <a:ext cx="4906000" cy="600000"/>
+          </a:xfrm>
+          <a:prstGeom prst="rect">
+            <a:avLst/>
+          </a:prstGeom>
+          <a:noFill/>
+        </p:spPr>
+        <p:txBody>
+          <a:bodyPr wrap="square">
+            <a:spAutoFit/>
+          </a:bodyPr>
+          <a:lstStyle/>
+          <a:p>
+            <a:pPr>
+              <a:spcAft>
+                <a:spcPts val="1260"/>
+              </a:spcAft>
+            </a:pPr>
+            <a:r>
+              <a:rPr sz="2800" b="1">
+                <a:solidFill>
+                  <a:srgbClr val="C2531C"/>
+                </a:solidFill>
+                <a:latin typeface="Nunito Sans"/>
+              </a:rPr>
+              <a:t>Control</a:t>
+            </a:r>
+          </a:p>
+        </p:txBody>
+      </p:sp>
+      <p:sp>
+        <p:nvSpPr>
+          <p:cNvPr id="6" name="TextBox 5"/>
+          <p:cNvSpPr txBox="1"/>
+          <p:nvPr/>
+        </p:nvSpPr>
+        <p:spPr>
+          <a:xfrm>
+            <a:off x="840000" y="2400000"/>
+            <a:ext cx="4906000" cy="3500000"/>
+          </a:xfrm>
+          <a:prstGeom prst="rect">
+            <a:avLst/>
+          </a:prstGeom>
+          <a:noFill/>
+        </p:spPr>
+        <p:txBody>
+          <a:bodyPr wrap="square">
+            <a:spAutoFit/>
+          </a:bodyPr>
+          <a:lstStyle/>
+          <a:p>
+            <a:pPr>
+              <a:spcAft>
+                <a:spcPts val="1170"/>
+              </a:spcAft>
+            </a:pPr>
+            <a:r>
+              <a:rPr sz="2600" b="1">
+                <a:solidFill>
+                  <a:srgbClr val="E8793A"/>
+                </a:solidFill>
+                <a:latin typeface="Nunito Sans"/>
+              </a:rPr>
+              <a:t>• </a:t>
+            </a:r>
+            <a:r>
+              <a:rPr sz="2600" b="0">
+                <a:solidFill>
+                  <a:srgbClr val="1F2A44"/>
+                </a:solidFill>
+                <a:latin typeface="Nunito Sans"/>
+              </a:rPr>
+              <a:t>Los celos como prueba de amor</a:t>
+            </a:r>
+          </a:p>
+          <a:p>
+            <a:pPr>
+              <a:spcAft>
+                <a:spcPts val="1170"/>
+              </a:spcAft>
+            </a:pPr>
+            <a:r>
+              <a:rPr sz="2600" b="1">
+                <a:solidFill>
+                  <a:srgbClr val="E8793A"/>
+                </a:solidFill>
+                <a:latin typeface="Nunito Sans"/>
+              </a:rPr>
+              <a:t>• </a:t>
+            </a:r>
+            <a:r>
+              <a:rPr sz="2600" b="0">
+                <a:solidFill>
+                  <a:srgbClr val="1F2A44"/>
+                </a:solidFill>
+                <a:latin typeface="Nunito Sans"/>
+              </a:rPr>
+              <a:t>Revisar el móvil y pedir contraseñas</a:t>
+            </a:r>
+          </a:p>
+          <a:p>
+            <a:pPr>
+              <a:spcAft>
+                <a:spcPts val="1170"/>
+              </a:spcAft>
+            </a:pPr>
+            <a:r>
+              <a:rPr sz="2600" b="1">
+                <a:solidFill>
+                  <a:srgbClr val="E8793A"/>
+                </a:solidFill>
+                <a:latin typeface="Nunito Sans"/>
+              </a:rPr>
+              <a:t>• </a:t>
+            </a:r>
+            <a:r>
+              <a:rPr sz="2600" b="0">
+                <a:solidFill>
+                  <a:srgbClr val="1F2A44"/>
+                </a:solidFill>
+                <a:latin typeface="Nunito Sans"/>
+              </a:rPr>
+              <a:t>Separarte de tu cuadrilla</a:t>
+            </a:r>
+          </a:p>
+        </p:txBody>
+      </p:sp>
+      <p:sp>
+        <p:nvSpPr>
+          <p:cNvPr id="7" name="Rectangle 6"/>
+          <p:cNvSpPr/>
+          <p:nvPr/>
+        </p:nvSpPr>
+        <p:spPr>
+          <a:xfrm>
+            <a:off x="6246000" y="1650000"/>
+            <a:ext cx="5306000" cy="4400000"/>
+          </a:xfrm>
+          <a:prstGeom prst="rect">
+            <a:avLst/>
+          </a:prstGeom>
+          <a:solidFill>
+            <a:srgbClr val="EAF0F7"/>
+          </a:solidFill>
+          <a:ln>
+            <a:noFill/>
+          </a:ln>
+        </p:spPr>
+        <p:style>
+          <a:lnRef idx="1">
+            <a:schemeClr val="accent1"/>
+          </a:lnRef>
+          <a:fillRef idx="3">
+            <a:schemeClr val="accent1"/>
+          </a:fillRef>
+          <a:effectRef idx="2">
+            <a:schemeClr val="accent1"/>
+          </a:effectRef>
+          <a:fontRef idx="minor">
+            <a:schemeClr val="lt1"/>
+          </a:fontRef>
+        </p:style>
+        <p:txBody>
+          <a:bodyPr rtlCol="0" anchor="ctr"/>
+          <a:lstStyle/>
+          <a:p>
+            <a:pPr algn="ctr"/>
+          </a:p>
+        </p:txBody>
+      </p:sp>
+      <p:sp>
+        <p:nvSpPr>
+          <p:cNvPr id="8" name="TextBox 7"/>
+          <p:cNvSpPr txBox="1"/>
+          <p:nvPr/>
+        </p:nvSpPr>
+        <p:spPr>
+          <a:xfrm>
+            <a:off x="6446000" y="1750000"/>
+            <a:ext cx="4906000" cy="600000"/>
+          </a:xfrm>
+          <a:prstGeom prst="rect">
+            <a:avLst/>
+          </a:prstGeom>
+          <a:noFill/>
+        </p:spPr>
+        <p:txBody>
+          <a:bodyPr wrap="square">
+            <a:spAutoFit/>
+          </a:bodyPr>
+          <a:lstStyle/>
+          <a:p>
+            <a:pPr>
+              <a:spcAft>
+                <a:spcPts val="1260"/>
+              </a:spcAft>
+            </a:pPr>
+            <a:r>
+              <a:rPr sz="2800" b="1">
+                <a:solidFill>
+                  <a:srgbClr val="2F6FB5"/>
+                </a:solidFill>
+                <a:latin typeface="Nunito Sans"/>
+              </a:rPr>
+              <a:t>Relación sana</a:t>
+            </a:r>
+          </a:p>
+        </p:txBody>
+      </p:sp>
+      <p:sp>
+        <p:nvSpPr>
+          <p:cNvPr id="9" name="TextBox 8"/>
+          <p:cNvSpPr txBox="1"/>
+          <p:nvPr/>
+        </p:nvSpPr>
+        <p:spPr>
+          <a:xfrm>
+            <a:off x="6446000" y="2400000"/>
+            <a:ext cx="4906000" cy="3500000"/>
+          </a:xfrm>
+          <a:prstGeom prst="rect">
+            <a:avLst/>
+          </a:prstGeom>
+          <a:noFill/>
+        </p:spPr>
+        <p:txBody>
+          <a:bodyPr wrap="square">
+            <a:spAutoFit/>
+          </a:bodyPr>
+          <a:lstStyle/>
+          <a:p>
+            <a:pPr>
+              <a:spcAft>
+                <a:spcPts val="1170"/>
+              </a:spcAft>
+            </a:pPr>
+            <a:r>
+              <a:rPr sz="2600" b="1">
+                <a:solidFill>
+                  <a:srgbClr val="E8793A"/>
+                </a:solidFill>
+                <a:latin typeface="Nunito Sans"/>
+              </a:rPr>
+              <a:t>• </a:t>
+            </a:r>
+            <a:r>
+              <a:rPr sz="2600" b="1">
+                <a:solidFill>
+                  <a:srgbClr val="1F2A44"/>
+                </a:solidFill>
+                <a:latin typeface="Nunito Sans"/>
+              </a:rPr>
+              <a:t>Respeto:</a:t>
+            </a:r>
+            <a:r>
+              <a:rPr sz="2600" b="0">
+                <a:solidFill>
+                  <a:srgbClr val="1F2A44"/>
+                </a:solidFill>
+                <a:latin typeface="Nunito Sans"/>
+              </a:rPr>
+              <a:t> tus decisiones y tus límites cuentan</a:t>
+            </a:r>
+          </a:p>
+          <a:p>
+            <a:pPr>
+              <a:spcAft>
+                <a:spcPts val="1170"/>
+              </a:spcAft>
+            </a:pPr>
+            <a:r>
+              <a:rPr sz="2600" b="1">
+                <a:solidFill>
+                  <a:srgbClr val="E8793A"/>
+                </a:solidFill>
+                <a:latin typeface="Nunito Sans"/>
+              </a:rPr>
+              <a:t>• </a:t>
+            </a:r>
+            <a:r>
+              <a:rPr sz="2600" b="1">
+                <a:solidFill>
+                  <a:srgbClr val="1F2A44"/>
+                </a:solidFill>
+                <a:latin typeface="Nunito Sans"/>
+              </a:rPr>
+              <a:t>Confianza:</a:t>
+            </a:r>
+            <a:r>
+              <a:rPr sz="2600" b="0">
+                <a:solidFill>
+                  <a:srgbClr val="1F2A44"/>
+                </a:solidFill>
+                <a:latin typeface="Nunito Sans"/>
+              </a:rPr>
+              <a:t> no hace falta vigilar</a:t>
+            </a:r>
+          </a:p>
+          <a:p>
+            <a:pPr>
+              <a:spcAft>
+                <a:spcPts val="1170"/>
+              </a:spcAft>
+            </a:pPr>
+            <a:r>
+              <a:rPr sz="2600" b="1">
+                <a:solidFill>
+                  <a:srgbClr val="E8793A"/>
+                </a:solidFill>
+                <a:latin typeface="Nunito Sans"/>
+              </a:rPr>
+              <a:t>• </a:t>
+            </a:r>
+            <a:r>
+              <a:rPr sz="2600" b="1">
+                <a:solidFill>
+                  <a:srgbClr val="1F2A44"/>
+                </a:solidFill>
+                <a:latin typeface="Nunito Sans"/>
+              </a:rPr>
+              <a:t>Libertad:</a:t>
+            </a:r>
+            <a:r>
+              <a:rPr sz="2600" b="0">
+                <a:solidFill>
+                  <a:srgbClr val="1F2A44"/>
+                </a:solidFill>
+                <a:latin typeface="Nunito Sans"/>
+              </a:rPr>
+              <a:t> tienes tu vida, tus amigos y tus aficiones</a:t>
+            </a:r>
+          </a:p>
+        </p:txBody>
+      </p:sp>
+    </p:spTree>
+  </p:cSld>
+  <p:clrMapOvr>
+    <a:masterClrMapping/>
+  </p:clrMapOvr>
+</p:sld>
+</file>
+
+<file path=ppt/slides/slide14.xml><?xml version="1.0" encoding="utf-8"?>
 <p:sld xmlns:a="http://schemas.openxmlformats.org/drawingml/2006/main" xmlns:p="http://schemas.openxmlformats.org/presentationml/2006/main" xmlns:r="http://schemas.openxmlformats.org/officeDocument/2006/relationships">
   <p:cSld>
     <p:bg>
@@ -4439,7 +4967,7 @@
                 </a:solidFill>
                 <a:latin typeface="Fredoka"/>
               </a:rPr>
-              <a:t>⚠ La cuadrilla perfecta</a:t>
+              <a:t>⚠ No se enseñan los móviles</a:t>
             </a:r>
           </a:p>
         </p:txBody>
@@ -4521,7 +5049,7 @@
                 </a:solidFill>
                 <a:latin typeface="Nunito Sans"/>
               </a:rPr>
-              <a:t>Un chico presume: «En mi cuadrilla nunca hay conflictos». Pero una del grupo siempre cede, y otro se calla cuando algo no le gusta.</a:t>
+              <a:t>Una chica y un chico llevan un año juntos. No se revisan el móvil ni se piden contraseñas. Una amiga opina: «Eso es que no confían el uno en el otro».</a:t>
             </a:r>
           </a:p>
         </p:txBody>
@@ -4569,7 +5097,7 @@
                 </a:solidFill>
                 <a:latin typeface="Nunito Sans"/>
               </a:rPr>
-              <a:t>Si nunca discuten, ¿es una cuadrilla sin conflictos?</a:t>
+              <a:t>¿Tiene razón esa amiga?</a:t>
             </a:r>
           </a:p>
           <a:p>
@@ -4594,7 +5122,7 @@
                 </a:solidFill>
                 <a:latin typeface="Nunito Sans"/>
               </a:rPr>
-              <a:t>Parece que sí: no hay gritos ni peleas.</a:t>
+              <a:t>Parece lógico: si no hay secretos, ¿por qué no enseñarlo?</a:t>
             </a:r>
           </a:p>
           <a:p>
@@ -4619,7 +5147,25 @@
                 </a:solidFill>
                 <a:latin typeface="Nunito Sans"/>
               </a:rPr>
-              <a:t>Pero una siempre cede y otro siempre evita. Los conflictos están, solo que escondidos.</a:t>
+              <a:t>Pero no pedir el móvil es justo lo contrario: </a:t>
+            </a:r>
+            <a:r>
+              <a:rPr sz="2400" b="1">
+                <a:solidFill>
+                  <a:srgbClr val="1F2A44"/>
+                </a:solidFill>
+                <a:latin typeface="Nunito Sans"/>
+              </a:rPr>
+              <a:t>confianza</a:t>
+            </a:r>
+            <a:r>
+              <a:rPr sz="2400" b="0">
+                <a:solidFill>
+                  <a:srgbClr val="1F2A44"/>
+                </a:solidFill>
+                <a:latin typeface="Nunito Sans"/>
+              </a:rPr>
+              <a:t>. Si confías, no necesitas comprobar.</a:t>
             </a:r>
           </a:p>
           <a:p>
@@ -4644,7 +5190,7 @@
                 </a:solidFill>
                 <a:latin typeface="Nunito Sans"/>
               </a:rPr>
-              <a:t>Un conflicto escondido no desaparece: puede crecer, como en el pensamiento de grupo (sesión 66).</a:t>
+              <a:t>¿Cómo lo sabe? Saca su conclusión de un dato que apunta a lo contrario. Y la intimidad es un derecho.</a:t>
             </a:r>
           </a:p>
           <a:p>
@@ -4669,150 +5215,7 @@
                 </a:solidFill>
                 <a:latin typeface="Nunito Sans"/>
               </a:rPr>
-              <a:t>Conclusión: que no haya peleas no significa que no haya conflictos. A veces falta alguien que diga «no».</a:t>
-            </a:r>
-          </a:p>
-        </p:txBody>
-      </p:sp>
-    </p:spTree>
-  </p:cSld>
-  <p:clrMapOvr>
-    <a:masterClrMapping/>
-  </p:clrMapOvr>
-</p:sld>
-</file>
-
-<file path=ppt/slides/slide14.xml><?xml version="1.0" encoding="utf-8"?>
-<p:sld xmlns:a="http://schemas.openxmlformats.org/drawingml/2006/main" xmlns:p="http://schemas.openxmlformats.org/presentationml/2006/main" xmlns:r="http://schemas.openxmlformats.org/officeDocument/2006/relationships">
-  <p:cSld>
-    <p:bg>
-      <p:bgPr>
-        <a:solidFill>
-          <a:srgbClr val="FBF7EF"/>
-        </a:solidFill>
-        <a:effectLst/>
-      </p:bgPr>
-    </p:bg>
-    <p:spTree>
-      <p:nvGrpSpPr>
-        <p:cNvPr id="1" name=""/>
-        <p:cNvGrpSpPr/>
-        <p:nvPr/>
-      </p:nvGrpSpPr>
-      <p:grpSpPr/>
-      <p:sp>
-        <p:nvSpPr>
-          <p:cNvPr id="2" name="TextBox 1"/>
-          <p:cNvSpPr txBox="1"/>
-          <p:nvPr/>
-        </p:nvSpPr>
-        <p:spPr>
-          <a:xfrm>
-            <a:off x="640000" y="380000"/>
-            <a:ext cx="10912000" cy="420000"/>
-          </a:xfrm>
-          <a:prstGeom prst="rect">
-            <a:avLst/>
-          </a:prstGeom>
-          <a:noFill/>
-        </p:spPr>
-        <p:txBody>
-          <a:bodyPr wrap="square">
-            <a:spAutoFit/>
-          </a:bodyPr>
-          <a:lstStyle/>
-          <a:p>
-            <a:pPr>
-              <a:spcAft>
-                <a:spcPts val="630"/>
-              </a:spcAft>
-            </a:pPr>
-            <a:r>
-              <a:rPr sz="1400" b="1">
-                <a:solidFill>
-                  <a:srgbClr val="E8793A"/>
-                </a:solidFill>
-                <a:latin typeface="Nunito Sans"/>
-              </a:rPr>
-              <a:t>LO DE HOY EN TRES LÍNEAS</a:t>
-            </a:r>
-          </a:p>
-        </p:txBody>
-      </p:sp>
-      <p:sp>
-        <p:nvSpPr>
-          <p:cNvPr id="3" name="TextBox 2"/>
-          <p:cNvSpPr txBox="1"/>
-          <p:nvPr/>
-        </p:nvSpPr>
-        <p:spPr>
-          <a:xfrm>
-            <a:off x="640000" y="760000"/>
-            <a:ext cx="10912000" cy="800000"/>
-          </a:xfrm>
-          <a:prstGeom prst="rect">
-            <a:avLst/>
-          </a:prstGeom>
-          <a:noFill/>
-        </p:spPr>
-        <p:txBody>
-          <a:bodyPr wrap="square">
-            <a:spAutoFit/>
-          </a:bodyPr>
-          <a:lstStyle/>
-          <a:p>
-            <a:pPr>
-              <a:spcAft>
-                <a:spcPts val="1710"/>
-              </a:spcAft>
-            </a:pPr>
-            <a:r>
-              <a:rPr sz="3800" b="1">
-                <a:solidFill>
-                  <a:srgbClr val="1F2A44"/>
-                </a:solidFill>
-                <a:latin typeface="Fredoka"/>
-              </a:rPr>
-              <a:t>Escríbelo tú primero, sin mirar</a:t>
-            </a:r>
-          </a:p>
-        </p:txBody>
-      </p:sp>
-      <p:sp>
-        <p:nvSpPr>
-          <p:cNvPr id="4" name="TextBox 3"/>
-          <p:cNvSpPr txBox="1"/>
-          <p:nvPr/>
-        </p:nvSpPr>
-        <p:spPr>
-          <a:xfrm>
-            <a:off x="640000" y="1800000"/>
-            <a:ext cx="10912000" cy="1500000"/>
-          </a:xfrm>
-          <a:prstGeom prst="rect">
-            <a:avLst/>
-          </a:prstGeom>
-          <a:noFill/>
-        </p:spPr>
-        <p:txBody>
-          <a:bodyPr wrap="square">
-            <a:spAutoFit/>
-          </a:bodyPr>
-          <a:lstStyle/>
-          <a:p>
-            <a:pPr>
-              <a:spcAft>
-                <a:spcPts val="1170"/>
-              </a:spcAft>
-            </a:pPr>
-            <a:r>
-              <a:rPr sz="2600" b="0">
-                <a:solidFill>
-                  <a:srgbClr val="4A5568"/>
-                </a:solidFill>
-                <a:latin typeface="Nunito Sans"/>
-              </a:rPr>
-              <a:t>Dos minutos. Después lo comparamos.</a:t>
+              <a:t>Conclusión: respetar el móvil del otro no es desconfianza; suele ser señal de una relación sana.</a:t>
             </a:r>
           </a:p>
         </p:txBody>
@@ -4890,8 +5293,8 @@
         </p:nvSpPr>
         <p:spPr>
           <a:xfrm>
-            <a:off x="640000" y="1300000"/>
-            <a:ext cx="10912000" cy="4800000"/>
+            <a:off x="640000" y="760000"/>
+            <a:ext cx="10912000" cy="800000"/>
           </a:xfrm>
           <a:prstGeom prst="rect">
             <a:avLst/>
@@ -4906,76 +5309,56 @@
           <a:p>
             <a:pPr>
               <a:spcAft>
-                <a:spcPts val="1350"/>
-              </a:spcAft>
-            </a:pPr>
-            <a:r>
-              <a:rPr sz="3000" b="1">
-                <a:solidFill>
-                  <a:srgbClr val="E8793A"/>
-                </a:solidFill>
-                <a:latin typeface="Nunito Sans"/>
-              </a:rPr>
-              <a:t>1. </a:t>
-            </a:r>
-            <a:r>
-              <a:rPr sz="3000" b="0">
+                <a:spcPts val="1710"/>
+              </a:spcAft>
+            </a:pPr>
+            <a:r>
+              <a:rPr sz="3800" b="1">
                 <a:solidFill>
                   <a:srgbClr val="1F2A44"/>
                 </a:solidFill>
-                <a:latin typeface="Nunito Sans"/>
-              </a:rPr>
-              <a:t>Un conflicto es un choque de intereses o necesidades; es normal y no es una pelea.</a:t>
-            </a:r>
-          </a:p>
-          <a:p>
-            <a:pPr>
-              <a:spcAft>
-                <a:spcPts val="1350"/>
-              </a:spcAft>
-            </a:pPr>
-            <a:r>
-              <a:rPr sz="3000" b="1">
-                <a:solidFill>
-                  <a:srgbClr val="E8793A"/>
-                </a:solidFill>
-                <a:latin typeface="Nunito Sans"/>
-              </a:rPr>
-              <a:t>2. </a:t>
-            </a:r>
-            <a:r>
-              <a:rPr sz="3000" b="0">
-                <a:solidFill>
-                  <a:srgbClr val="1F2A44"/>
-                </a:solidFill>
-                <a:latin typeface="Nunito Sans"/>
-              </a:rPr>
-              <a:t>Hay cinco actitudes: evitar, ceder, competir, pactar y colaborar; ninguna vale siempre.</a:t>
-            </a:r>
-          </a:p>
-          <a:p>
-            <a:pPr>
-              <a:spcAft>
-                <a:spcPts val="1350"/>
-              </a:spcAft>
-            </a:pPr>
-            <a:r>
-              <a:rPr sz="3000" b="1">
-                <a:solidFill>
-                  <a:srgbClr val="E8793A"/>
-                </a:solidFill>
-                <a:latin typeface="Nunito Sans"/>
-              </a:rPr>
-              <a:t>3. </a:t>
-            </a:r>
-            <a:r>
-              <a:rPr sz="3000" b="0">
-                <a:solidFill>
-                  <a:srgbClr val="1F2A44"/>
-                </a:solidFill>
-                <a:latin typeface="Nunito Sans"/>
-              </a:rPr>
-              <a:t>La postura es lo que pido; el interés, lo que necesito. Preguntar «¿para qué?» ayuda.</a:t>
+                <a:latin typeface="Fredoka"/>
+              </a:rPr>
+              <a:t>Escríbelo tú primero, sin mirar</a:t>
+            </a:r>
+          </a:p>
+        </p:txBody>
+      </p:sp>
+      <p:sp>
+        <p:nvSpPr>
+          <p:cNvPr id="4" name="TextBox 3"/>
+          <p:cNvSpPr txBox="1"/>
+          <p:nvPr/>
+        </p:nvSpPr>
+        <p:spPr>
+          <a:xfrm>
+            <a:off x="640000" y="1800000"/>
+            <a:ext cx="10912000" cy="1500000"/>
+          </a:xfrm>
+          <a:prstGeom prst="rect">
+            <a:avLst/>
+          </a:prstGeom>
+          <a:noFill/>
+        </p:spPr>
+        <p:txBody>
+          <a:bodyPr wrap="square">
+            <a:spAutoFit/>
+          </a:bodyPr>
+          <a:lstStyle/>
+          <a:p>
+            <a:pPr>
+              <a:spcAft>
+                <a:spcPts val="1170"/>
+              </a:spcAft>
+            </a:pPr>
+            <a:r>
+              <a:rPr sz="2600" b="0">
+                <a:solidFill>
+                  <a:srgbClr val="4A5568"/>
+                </a:solidFill>
+                <a:latin typeface="Nunito Sans"/>
+              </a:rPr>
+              <a:t>Dos minutos. Después lo comparamos.</a:t>
             </a:r>
           </a:p>
         </p:txBody>
@@ -4994,7 +5377,7 @@
     <p:bg>
       <p:bgPr>
         <a:solidFill>
-          <a:srgbClr val="1F2A44"/>
+          <a:srgbClr val="FBF7EF"/>
         </a:solidFill>
         <a:effectLst/>
       </p:bgPr>
@@ -5036,11 +5419,11 @@
             <a:r>
               <a:rPr sz="1400" b="1">
                 <a:solidFill>
-                  <a:srgbClr val="F4B183"/>
-                </a:solidFill>
-                <a:latin typeface="Nunito Sans"/>
-              </a:rPr>
-              <a:t>VÍDEO</a:t>
+                  <a:srgbClr val="E8793A"/>
+                </a:solidFill>
+                <a:latin typeface="Nunito Sans"/>
+              </a:rPr>
+              <a:t>LO DE HOY EN TRES LÍNEAS</a:t>
             </a:r>
           </a:p>
         </p:txBody>
@@ -5053,8 +5436,8 @@
         </p:nvSpPr>
         <p:spPr>
           <a:xfrm>
-            <a:off x="640000" y="760000"/>
-            <a:ext cx="10912000" cy="800000"/>
+            <a:off x="640000" y="1300000"/>
+            <a:ext cx="10912000" cy="4800000"/>
           </a:xfrm>
           <a:prstGeom prst="rect">
             <a:avLst/>
@@ -5069,56 +5452,76 @@
           <a:p>
             <a:pPr>
               <a:spcAft>
-                <a:spcPts val="1620"/>
-              </a:spcAft>
-            </a:pPr>
-            <a:r>
-              <a:rPr sz="3600" b="1">
-                <a:solidFill>
-                  <a:srgbClr val="FBF7EF"/>
-                </a:solidFill>
-                <a:latin typeface="Fredoka"/>
-              </a:rPr>
-              <a:t>Estilos para afrontar un conflicto y la diferencia entre posturas e intereses</a:t>
-            </a:r>
-          </a:p>
-        </p:txBody>
-      </p:sp>
-      <p:sp>
-        <p:nvSpPr>
-          <p:cNvPr id="4" name="TextBox 3"/>
-          <p:cNvSpPr txBox="1"/>
-          <p:nvPr/>
-        </p:nvSpPr>
-        <p:spPr>
-          <a:xfrm>
-            <a:off x="640000" y="2200000"/>
-            <a:ext cx="10912000" cy="2000000"/>
-          </a:xfrm>
-          <a:prstGeom prst="rect">
-            <a:avLst/>
-          </a:prstGeom>
-          <a:noFill/>
-        </p:spPr>
-        <p:txBody>
-          <a:bodyPr wrap="square">
-            <a:spAutoFit/>
-          </a:bodyPr>
-          <a:lstStyle/>
-          <a:p>
-            <a:pPr>
-              <a:spcAft>
-                <a:spcPts val="1080"/>
-              </a:spcAft>
-            </a:pPr>
-            <a:r>
-              <a:rPr sz="2400" b="0">
-                <a:solidFill>
-                  <a:srgbClr val="C9D3E6"/>
-                </a:solidFill>
-                <a:latin typeface="Nunito Sans"/>
-              </a:rPr>
-              <a:t>Que vean otros ejemplos de las cinco actitudes y de cómo buscar el interés detrás de la postura.</a:t>
+                <a:spcPts val="1350"/>
+              </a:spcAft>
+            </a:pPr>
+            <a:r>
+              <a:rPr sz="3000" b="1">
+                <a:solidFill>
+                  <a:srgbClr val="E8793A"/>
+                </a:solidFill>
+                <a:latin typeface="Nunito Sans"/>
+              </a:rPr>
+              <a:t>1. </a:t>
+            </a:r>
+            <a:r>
+              <a:rPr sz="3000" b="0">
+                <a:solidFill>
+                  <a:srgbClr val="1F2A44"/>
+                </a:solidFill>
+                <a:latin typeface="Nunito Sans"/>
+              </a:rPr>
+              <a:t>Los mitos del amor romántico son creencias falsas o exageradas sobre el amor.</a:t>
+            </a:r>
+          </a:p>
+          <a:p>
+            <a:pPr>
+              <a:spcAft>
+                <a:spcPts val="1350"/>
+              </a:spcAft>
+            </a:pPr>
+            <a:r>
+              <a:rPr sz="3000" b="1">
+                <a:solidFill>
+                  <a:srgbClr val="E8793A"/>
+                </a:solidFill>
+                <a:latin typeface="Nunito Sans"/>
+              </a:rPr>
+              <a:t>2. </a:t>
+            </a:r>
+            <a:r>
+              <a:rPr sz="3000" b="0">
+                <a:solidFill>
+                  <a:srgbClr val="1F2A44"/>
+                </a:solidFill>
+                <a:latin typeface="Nunito Sans"/>
+              </a:rPr>
+              <a:t>Los celos no prueban amor; vigilar y controlar no es cariño.</a:t>
+            </a:r>
+          </a:p>
+          <a:p>
+            <a:pPr>
+              <a:spcAft>
+                <a:spcPts val="1350"/>
+              </a:spcAft>
+            </a:pPr>
+            <a:r>
+              <a:rPr sz="3000" b="1">
+                <a:solidFill>
+                  <a:srgbClr val="E8793A"/>
+                </a:solidFill>
+                <a:latin typeface="Nunito Sans"/>
+              </a:rPr>
+              <a:t>3. </a:t>
+            </a:r>
+            <a:r>
+              <a:rPr sz="3000" b="0">
+                <a:solidFill>
+                  <a:srgbClr val="1F2A44"/>
+                </a:solidFill>
+                <a:latin typeface="Nunito Sans"/>
+              </a:rPr>
+              <a:t>Una relación sana se basa en respeto, confianza y libertad.</a:t>
             </a:r>
           </a:p>
         </p:txBody>
@@ -5183,6 +5586,149 @@
                 </a:solidFill>
                 <a:latin typeface="Nunito Sans"/>
               </a:rPr>
+              <a:t>VÍDEO</a:t>
+            </a:r>
+          </a:p>
+        </p:txBody>
+      </p:sp>
+      <p:sp>
+        <p:nvSpPr>
+          <p:cNvPr id="3" name="TextBox 2"/>
+          <p:cNvSpPr txBox="1"/>
+          <p:nvPr/>
+        </p:nvSpPr>
+        <p:spPr>
+          <a:xfrm>
+            <a:off x="640000" y="760000"/>
+            <a:ext cx="10912000" cy="800000"/>
+          </a:xfrm>
+          <a:prstGeom prst="rect">
+            <a:avLst/>
+          </a:prstGeom>
+          <a:noFill/>
+        </p:spPr>
+        <p:txBody>
+          <a:bodyPr wrap="square">
+            <a:spAutoFit/>
+          </a:bodyPr>
+          <a:lstStyle/>
+          <a:p>
+            <a:pPr>
+              <a:spcAft>
+                <a:spcPts val="1620"/>
+              </a:spcAft>
+            </a:pPr>
+            <a:r>
+              <a:rPr sz="3600" b="1">
+                <a:solidFill>
+                  <a:srgbClr val="FBF7EF"/>
+                </a:solidFill>
+                <a:latin typeface="Fredoka"/>
+              </a:rPr>
+              <a:t>Los mitos del amor romántico y el control en la pareja</a:t>
+            </a:r>
+          </a:p>
+        </p:txBody>
+      </p:sp>
+      <p:sp>
+        <p:nvSpPr>
+          <p:cNvPr id="4" name="TextBox 3"/>
+          <p:cNvSpPr txBox="1"/>
+          <p:nvPr/>
+        </p:nvSpPr>
+        <p:spPr>
+          <a:xfrm>
+            <a:off x="640000" y="2200000"/>
+            <a:ext cx="10912000" cy="2000000"/>
+          </a:xfrm>
+          <a:prstGeom prst="rect">
+            <a:avLst/>
+          </a:prstGeom>
+          <a:noFill/>
+        </p:spPr>
+        <p:txBody>
+          <a:bodyPr wrap="square">
+            <a:spAutoFit/>
+          </a:bodyPr>
+          <a:lstStyle/>
+          <a:p>
+            <a:pPr>
+              <a:spcAft>
+                <a:spcPts val="1080"/>
+              </a:spcAft>
+            </a:pPr>
+            <a:r>
+              <a:rPr sz="2400" b="0">
+                <a:solidFill>
+                  <a:srgbClr val="C9D3E6"/>
+                </a:solidFill>
+                <a:latin typeface="Nunito Sans"/>
+              </a:rPr>
+              <a:t>Ver más mitos en canciones y series, y separarlos de lo que es una relación sana.</a:t>
+            </a:r>
+          </a:p>
+        </p:txBody>
+      </p:sp>
+    </p:spTree>
+  </p:cSld>
+  <p:clrMapOvr>
+    <a:masterClrMapping/>
+  </p:clrMapOvr>
+</p:sld>
+</file>
+
+<file path=ppt/slides/slide18.xml><?xml version="1.0" encoding="utf-8"?>
+<p:sld xmlns:a="http://schemas.openxmlformats.org/drawingml/2006/main" xmlns:p="http://schemas.openxmlformats.org/presentationml/2006/main" xmlns:r="http://schemas.openxmlformats.org/officeDocument/2006/relationships">
+  <p:cSld>
+    <p:bg>
+      <p:bgPr>
+        <a:solidFill>
+          <a:srgbClr val="1F2A44"/>
+        </a:solidFill>
+        <a:effectLst/>
+      </p:bgPr>
+    </p:bg>
+    <p:spTree>
+      <p:nvGrpSpPr>
+        <p:cNvPr id="1" name=""/>
+        <p:cNvGrpSpPr/>
+        <p:nvPr/>
+      </p:nvGrpSpPr>
+      <p:grpSpPr/>
+      <p:sp>
+        <p:nvSpPr>
+          <p:cNvPr id="2" name="TextBox 1"/>
+          <p:cNvSpPr txBox="1"/>
+          <p:nvPr/>
+        </p:nvSpPr>
+        <p:spPr>
+          <a:xfrm>
+            <a:off x="640000" y="380000"/>
+            <a:ext cx="10912000" cy="420000"/>
+          </a:xfrm>
+          <a:prstGeom prst="rect">
+            <a:avLst/>
+          </a:prstGeom>
+          <a:noFill/>
+        </p:spPr>
+        <p:txBody>
+          <a:bodyPr wrap="square">
+            <a:spAutoFit/>
+          </a:bodyPr>
+          <a:lstStyle/>
+          <a:p>
+            <a:pPr>
+              <a:spcAft>
+                <a:spcPts val="630"/>
+              </a:spcAft>
+            </a:pPr>
+            <a:r>
+              <a:rPr sz="1400" b="1">
+                <a:solidFill>
+                  <a:srgbClr val="F4B183"/>
+                </a:solidFill>
+                <a:latin typeface="Nunito Sans"/>
+              </a:rPr>
               <a:t>AHORA, LA HOJA DEL DÍA</a:t>
             </a:r>
           </a:p>
@@ -5776,7 +6322,7 @@
                 </a:solidFill>
                 <a:latin typeface="Nunito Sans"/>
               </a:rPr>
-              <a:t>Cuando la emoción es fuerte: nombrar, ______ y preguntar.  (sesión 75)</a:t>
+              <a:t>Un buen amigo quiere tu ______, aunque a veces eso sea decir que no.  (sesión 75)</a:t>
             </a:r>
           </a:p>
           <a:p>
@@ -5801,7 +6347,7 @@
                 </a:solidFill>
                 <a:latin typeface="Nunito Sans"/>
               </a:rPr>
-              <a:t>El miedo nos avisa de que puede haber un ______.  (sesión 75)</a:t>
+              <a:t>La amistad por ______ se basa en pasarlo bien juntos.  (sesión 75)</a:t>
             </a:r>
           </a:p>
           <a:p>
@@ -5978,7 +6524,7 @@
                 </a:solidFill>
                 <a:latin typeface="Nunito Sans"/>
               </a:rPr>
-              <a:t>Cuando la emoción es fuerte: nombrar, </a:t>
+              <a:t>Un buen amigo quiere tu </a:t>
             </a:r>
             <a:r>
               <a:rPr sz="2600" b="1">
@@ -5987,7 +6533,7 @@
                 </a:solidFill>
                 <a:latin typeface="Nunito Sans"/>
               </a:rPr>
-              <a:t>esperar</a:t>
+              <a:t>bien</a:t>
             </a:r>
             <a:r>
               <a:rPr sz="2600" b="0">
@@ -5996,7 +6542,7 @@
                 </a:solidFill>
                 <a:latin typeface="Nunito Sans"/>
               </a:rPr>
-              <a:t> y preguntar.  (sesión 75)</a:t>
+              <a:t>, aunque a veces eso sea decir que no.  (sesión 75)</a:t>
             </a:r>
           </a:p>
           <a:p>
@@ -6021,7 +6567,7 @@
                 </a:solidFill>
                 <a:latin typeface="Nunito Sans"/>
               </a:rPr>
-              <a:t>El miedo nos avisa de que puede haber un </a:t>
+              <a:t>La amistad por </a:t>
             </a:r>
             <a:r>
               <a:rPr sz="2600" b="1">
@@ -6030,7 +6576,7 @@
                 </a:solidFill>
                 <a:latin typeface="Nunito Sans"/>
               </a:rPr>
-              <a:t>peligro</a:t>
+              <a:t>placer</a:t>
             </a:r>
             <a:r>
               <a:rPr sz="2600" b="0">
@@ -6039,7 +6585,7 @@
                 </a:solidFill>
                 <a:latin typeface="Nunito Sans"/>
               </a:rPr>
-              <a:t>.  (sesión 75)</a:t>
+              <a:t> se basa en pasarlo bien juntos.  (sesión 75)</a:t>
             </a:r>
           </a:p>
           <a:p>
@@ -6229,7 +6775,7 @@
                 </a:solidFill>
                 <a:latin typeface="Nunito Sans"/>
               </a:rPr>
-              <a:t>Una chica y su hermano quieren el ordenador de casa a la misma hora. Cada uno grita: «¡Lo pedí yo primero!». Nadie cede.</a:t>
+              <a:t>Letra de una canción inventada: «Sin ti no soy nada. Eres mi media naranja. Te quiero tanto que me muero de celos».</a:t>
             </a:r>
           </a:p>
         </p:txBody>
@@ -6268,7 +6814,7 @@
                 </a:solidFill>
                 <a:latin typeface="Nunito Sans"/>
               </a:rPr>
-              <a:t>¿Qué quiere de verdad cada uno? ¿Hay alguna salida en la que ganen los dos?</a:t>
+              <a:t>¿Qué ideas sobre el amor hay en esa letra? ¿Son verdad?</a:t>
             </a:r>
           </a:p>
         </p:txBody>
@@ -6372,7 +6918,7 @@
                 </a:solidFill>
                 <a:latin typeface="Fredoka"/>
               </a:rPr>
-              <a:t>Qué es un conflicto</a:t>
+              <a:t>Mitos, roles y control</a:t>
             </a:r>
           </a:p>
         </p:txBody>
@@ -6437,7 +6983,7 @@
                 </a:solidFill>
                 <a:latin typeface="Nunito Sans"/>
               </a:rPr>
-              <a:t>BLOQUE 1 · QUÉ ES UN CONFLICTO</a:t>
+              <a:t>BLOQUE 1 · MITOS, ROLES Y CONTROL</a:t>
             </a:r>
           </a:p>
         </p:txBody>
@@ -6476,7 +7022,7 @@
                 </a:solidFill>
                 <a:latin typeface="Fredoka"/>
               </a:rPr>
-              <a:t>Conflicto</a:t>
+              <a:t>Mito del amor romántico</a:t>
             </a:r>
           </a:p>
         </p:txBody>
@@ -6558,7 +7104,25 @@
                 </a:solidFill>
                 <a:latin typeface="Nunito Sans"/>
               </a:rPr>
-              <a:t>Es un choque entre personas que quieren o necesitan cosas que, en ese momento, parecen incompatibles.</a:t>
+              <a:t>Un </a:t>
+            </a:r>
+            <a:r>
+              <a:rPr sz="2800" b="1">
+                <a:solidFill>
+                  <a:srgbClr val="1F2A44"/>
+                </a:solidFill>
+                <a:latin typeface="Nunito Sans"/>
+              </a:rPr>
+              <a:t>mito</a:t>
+            </a:r>
+            <a:r>
+              <a:rPr sz="2800" b="1">
+                <a:solidFill>
+                  <a:srgbClr val="1F2A44"/>
+                </a:solidFill>
+                <a:latin typeface="Nunito Sans"/>
+              </a:rPr>
+              <a:t> del amor romántico es una creencia sobre el amor que mucha gente da por verdadera, pero es falsa o exagerada.</a:t>
             </a:r>
           </a:p>
         </p:txBody>
@@ -6606,16 +7170,41 @@
                 </a:solidFill>
                 <a:latin typeface="Nunito Sans"/>
               </a:rPr>
-              <a:t>Es </a:t>
-            </a:r>
+              <a:t>Lo aprendemos de películas, canciones, series y redes</a:t>
+            </a:r>
+          </a:p>
+          <a:p>
+            <a:pPr>
+              <a:spcAft>
+                <a:spcPts val="1260"/>
+              </a:spcAft>
+            </a:pPr>
             <a:r>
               <a:rPr sz="2800" b="1">
                 <a:solidFill>
+                  <a:srgbClr val="E8793A"/>
+                </a:solidFill>
+                <a:latin typeface="Nunito Sans"/>
+              </a:rPr>
+              <a:t>• </a:t>
+            </a:r>
+            <a:r>
+              <a:rPr sz="2800" b="0">
+                <a:solidFill>
                   <a:srgbClr val="1F2A44"/>
                 </a:solidFill>
                 <a:latin typeface="Nunito Sans"/>
               </a:rPr>
-              <a:t>normal</a:t>
+              <a:t>Lo creemos por </a:t>
+            </a:r>
+            <a:r>
+              <a:rPr sz="2800" b="1">
+                <a:solidFill>
+                  <a:srgbClr val="1F2A44"/>
+                </a:solidFill>
+                <a:latin typeface="Nunito Sans"/>
+              </a:rPr>
+              <a:t>costumbre</a:t>
             </a:r>
             <a:r>
               <a:rPr sz="2800" b="0">
@@ -6624,7 +7213,7 @@
                 </a:solidFill>
                 <a:latin typeface="Nunito Sans"/>
               </a:rPr>
-              <a:t>: aparece en cualquier grupo</a:t>
+              <a:t> y por el grupo (sesión 3)</a:t>
             </a:r>
           </a:p>
           <a:p>
@@ -6649,50 +7238,32 @@
                 </a:solidFill>
                 <a:latin typeface="Nunito Sans"/>
               </a:rPr>
-              <a:t>No es lo mismo que una </a:t>
-            </a:r>
+              <a:t>La idea de la «otra mitad» ya sale en «El banquete», de Platón</a:t>
+            </a:r>
+          </a:p>
+          <a:p>
+            <a:pPr>
+              <a:spcAft>
+                <a:spcPts val="1260"/>
+              </a:spcAft>
+            </a:pPr>
             <a:r>
               <a:rPr sz="2800" b="1">
                 <a:solidFill>
+                  <a:srgbClr val="E8793A"/>
+                </a:solidFill>
+                <a:latin typeface="Nunito Sans"/>
+              </a:rPr>
+              <a:t>• </a:t>
+            </a:r>
+            <a:r>
+              <a:rPr sz="2800" b="0">
+                <a:solidFill>
                   <a:srgbClr val="1F2A44"/>
                 </a:solidFill>
                 <a:latin typeface="Nunito Sans"/>
               </a:rPr>
-              <a:t>pelea</a:t>
-            </a:r>
-          </a:p>
-          <a:p>
-            <a:pPr>
-              <a:spcAft>
-                <a:spcPts val="1260"/>
-              </a:spcAft>
-            </a:pPr>
-            <a:r>
-              <a:rPr sz="2800" b="1">
-                <a:solidFill>
-                  <a:srgbClr val="E8793A"/>
-                </a:solidFill>
-                <a:latin typeface="Nunito Sans"/>
-              </a:rPr>
-              <a:t>• </a:t>
-            </a:r>
-            <a:r>
-              <a:rPr sz="2800" b="0">
-                <a:solidFill>
-                  <a:srgbClr val="1F2A44"/>
-                </a:solidFill>
-                <a:latin typeface="Nunito Sans"/>
-              </a:rPr>
-              <a:t>La pelea es una mala forma de </a:t>
-            </a:r>
-            <a:r>
-              <a:rPr sz="2800" b="1">
-                <a:solidFill>
-                  <a:srgbClr val="1F2A44"/>
-                </a:solidFill>
-                <a:latin typeface="Nunito Sans"/>
-              </a:rPr>
-              <a:t>afrontarlo</a:t>
+              <a:t>El psicólogo Carlos Yela los estudió y clasificó en España</a:t>
             </a:r>
           </a:p>
         </p:txBody>
@@ -6757,7 +7328,7 @@
                 </a:solidFill>
                 <a:latin typeface="Nunito Sans"/>
               </a:rPr>
-              <a:t>BLOQUE 1 · QUÉ ES UN CONFLICTO</a:t>
+              <a:t>BLOQUE 1 · MITOS, ROLES Y CONTROL</a:t>
             </a:r>
           </a:p>
         </p:txBody>
@@ -6796,7 +7367,7 @@
                 </a:solidFill>
                 <a:latin typeface="Fredoka"/>
               </a:rPr>
-              <a:t>Tipos de conflicto según lo que choca</a:t>
+              <a:t>Cuatro mitos y por qué fallan</a:t>
             </a:r>
           </a:p>
         </p:txBody>
@@ -6837,7 +7408,7 @@
                           </a:solidFill>
                           <a:latin typeface="Fredoka"/>
                         </a:rPr>
-                        <a:t>Tipo</a:t>
+                        <a:t>Mito</a:t>
                       </a:r>
                     </a:p>
                   </a:txBody>
@@ -6859,7 +7430,7 @@
                           </a:solidFill>
                           <a:latin typeface="Fredoka"/>
                         </a:rPr>
-                        <a:t>Qué choca</a:t>
+                        <a:t>Qué dice</a:t>
                       </a:r>
                     </a:p>
                   </a:txBody>
@@ -6881,7 +7452,7 @@
                           </a:solidFill>
                           <a:latin typeface="Fredoka"/>
                         </a:rPr>
-                        <a:t>Ejemplo</a:t>
+                        <a:t>Por qué falla</a:t>
                       </a:r>
                     </a:p>
                   </a:txBody>
@@ -6899,13 +7470,22 @@
                     <a:lstStyle/>
                     <a:p>
                       <a:r>
+                        <a:rPr sz="2000" b="0">
+                          <a:solidFill>
+                            <a:srgbClr val="1F2A44"/>
+                          </a:solidFill>
+                          <a:latin typeface="Nunito Sans"/>
+                        </a:rPr>
+                        <a:t>La </a:t>
+                      </a:r>
+                      <a:r>
                         <a:rPr sz="2000" b="1">
                           <a:solidFill>
                             <a:srgbClr val="1F2A44"/>
                           </a:solidFill>
                           <a:latin typeface="Nunito Sans"/>
                         </a:rPr>
-                        <a:t>De recursos</a:t>
+                        <a:t>media naranja</a:t>
                       </a:r>
                     </a:p>
                   </a:txBody>
@@ -6927,7 +7507,7 @@
                           </a:solidFill>
                           <a:latin typeface="Nunito Sans"/>
                         </a:rPr>
-                        <a:t>Hay una cosa y la quieren dos</a:t>
+                        <a:t>Hay una sola persona hecha para ti</a:t>
                       </a:r>
                     </a:p>
                   </a:txBody>
@@ -6949,7 +7529,7 @@
                           </a:solidFill>
                           <a:latin typeface="Nunito Sans"/>
                         </a:rPr>
-                        <a:t>El ordenador, el mando, el balón</a:t>
+                        <a:t>Nadie está a medias; el amor puede llegar más de una vez</a:t>
                       </a:r>
                     </a:p>
                   </a:txBody>
@@ -6967,13 +7547,31 @@
                     <a:lstStyle/>
                     <a:p>
                       <a:r>
+                        <a:rPr sz="2000" b="0">
+                          <a:solidFill>
+                            <a:srgbClr val="1F2A44"/>
+                          </a:solidFill>
+                          <a:latin typeface="Nunito Sans"/>
+                        </a:rPr>
+                        <a:t>Los </a:t>
+                      </a:r>
+                      <a:r>
                         <a:rPr sz="2000" b="1">
                           <a:solidFill>
                             <a:srgbClr val="1F2A44"/>
                           </a:solidFill>
                           <a:latin typeface="Nunito Sans"/>
                         </a:rPr>
-                        <a:t>De necesidades</a:t>
+                        <a:t>celos</a:t>
+                      </a:r>
+                      <a:r>
+                        <a:rPr sz="2000" b="0">
+                          <a:solidFill>
+                            <a:srgbClr val="1F2A44"/>
+                          </a:solidFill>
+                          <a:latin typeface="Nunito Sans"/>
+                        </a:rPr>
+                        <a:t> son amor</a:t>
                       </a:r>
                     </a:p>
                   </a:txBody>
@@ -6995,7 +7593,7 @@
                           </a:solidFill>
                           <a:latin typeface="Nunito Sans"/>
                         </a:rPr>
-                        <a:t>Uno necesita algo que molesta al otro</a:t>
+                        <a:t>Si tiene celos, es que te quiere</a:t>
                       </a:r>
                     </a:p>
                   </a:txBody>
@@ -7017,7 +7615,7 @@
                           </a:solidFill>
                           <a:latin typeface="Nunito Sans"/>
                         </a:rPr>
-                        <a:t>Estudiar en silencio y escuchar música</a:t>
+                        <a:t>Los celos hablan de miedo e inseguridad, no de cuánto quiere</a:t>
                       </a:r>
                     </a:p>
                   </a:txBody>
@@ -7035,13 +7633,22 @@
                     <a:lstStyle/>
                     <a:p>
                       <a:r>
+                        <a:rPr sz="2000" b="0">
+                          <a:solidFill>
+                            <a:srgbClr val="1F2A44"/>
+                          </a:solidFill>
+                          <a:latin typeface="Nunito Sans"/>
+                        </a:rPr>
+                        <a:t>El amor </a:t>
+                      </a:r>
+                      <a:r>
                         <a:rPr sz="2000" b="1">
                           <a:solidFill>
                             <a:srgbClr val="1F2A44"/>
                           </a:solidFill>
                           <a:latin typeface="Nunito Sans"/>
                         </a:rPr>
-                        <a:t>De ideas o valores</a:t>
+                        <a:t>lo puede todo</a:t>
                       </a:r>
                     </a:p>
                   </a:txBody>
@@ -7063,7 +7670,7 @@
                           </a:solidFill>
                           <a:latin typeface="Nunito Sans"/>
                         </a:rPr>
-                        <a:t>Piensan distinto sobre lo importante</a:t>
+                        <a:t>Si os queréis, todo se arregla</a:t>
                       </a:r>
                     </a:p>
                   </a:txBody>
@@ -7085,7 +7692,7 @@
                           </a:solidFill>
                           <a:latin typeface="Nunito Sans"/>
                         </a:rPr>
-                        <a:t>Qué es justo en un reparto</a:t>
+                        <a:t>Querer no basta si hay faltas de respeto o daño</a:t>
                       </a:r>
                     </a:p>
                   </a:txBody>
@@ -7103,13 +7710,31 @@
                     <a:lstStyle/>
                     <a:p>
                       <a:r>
+                        <a:rPr sz="2000" b="0">
+                          <a:solidFill>
+                            <a:srgbClr val="1F2A44"/>
+                          </a:solidFill>
+                          <a:latin typeface="Nunito Sans"/>
+                        </a:rPr>
+                        <a:t>«Si me quiere, me enseña el </a:t>
+                      </a:r>
+                      <a:r>
                         <a:rPr sz="2000" b="1">
                           <a:solidFill>
                             <a:srgbClr val="1F2A44"/>
                           </a:solidFill>
                           <a:latin typeface="Nunito Sans"/>
                         </a:rPr>
-                        <a:t>Malentendido</a:t>
+                        <a:t>móvil</a:t>
+                      </a:r>
+                      <a:r>
+                        <a:rPr sz="2000" b="0">
+                          <a:solidFill>
+                            <a:srgbClr val="1F2A44"/>
+                          </a:solidFill>
+                          <a:latin typeface="Nunito Sans"/>
+                        </a:rPr>
+                        <a:t>»</a:t>
                       </a:r>
                     </a:p>
                   </a:txBody>
@@ -7131,7 +7756,7 @@
                           </a:solidFill>
                           <a:latin typeface="Nunito Sans"/>
                         </a:rPr>
-                        <a:t>Uno entiende mal lo que el otro dijo</a:t>
+                        <a:t>Quien ama no tiene secretos</a:t>
                       </a:r>
                     </a:p>
                   </a:txBody>
@@ -7153,7 +7778,7 @@
                           </a:solidFill>
                           <a:latin typeface="Nunito Sans"/>
                         </a:rPr>
-                        <a:t>Un mensaje leído con otro tono</a:t>
+                        <a:t>Cada uno tiene derecho a su intimidad, también en pareja</a:t>
                       </a:r>
                     </a:p>
                   </a:txBody>
@@ -7228,7 +7853,7 @@
                 </a:solidFill>
                 <a:latin typeface="Nunito Sans"/>
               </a:rPr>
-              <a:t>BLOQUE 1 · QUÉ ES UN CONFLICTO</a:t>
+              <a:t>BLOQUE 1 · MITOS, ROLES Y CONTROL</a:t>
             </a:r>
           </a:p>
         </p:txBody>
@@ -7267,7 +7892,7 @@
                 </a:solidFill>
                 <a:latin typeface="Fredoka"/>
               </a:rPr>
-              <a:t>Cinco actitudes ante un conflicto</a:t>
+              <a:t>Roles de género en las relaciones</a:t>
             </a:r>
           </a:p>
         </p:txBody>
@@ -7306,7 +7931,7 @@
                 </a:solidFill>
                 <a:latin typeface="Nunito Sans"/>
               </a:rPr>
-              <a:t>Es un modelo conocido, de Thomas y Kilmann (1974). No es una ley: sirve para pensar.</a:t>
+              <a:t>Ideas fijas sobre cómo «deben» ser los chicos y las chicas en pareja:</a:t>
             </a:r>
           </a:p>
         </p:txBody>
@@ -7348,13 +7973,54 @@
               <a:t>• </a:t>
             </a:r>
             <a:r>
+              <a:rPr sz="2800" b="0">
+                <a:solidFill>
+                  <a:srgbClr val="1F2A44"/>
+                </a:solidFill>
+                <a:latin typeface="Nunito Sans"/>
+              </a:rPr>
+              <a:t>«Él protege y decide; ella espera y cede»</a:t>
+            </a:r>
+          </a:p>
+          <a:p>
+            <a:pPr>
+              <a:spcAft>
+                <a:spcPts val="1260"/>
+              </a:spcAft>
+            </a:pPr>
+            <a:r>
               <a:rPr sz="2800" b="1">
                 <a:solidFill>
+                  <a:srgbClr val="E8793A"/>
+                </a:solidFill>
+                <a:latin typeface="Nunito Sans"/>
+              </a:rPr>
+              <a:t>• </a:t>
+            </a:r>
+            <a:r>
+              <a:rPr sz="2800" b="0">
+                <a:solidFill>
                   <a:srgbClr val="1F2A44"/>
                 </a:solidFill>
                 <a:latin typeface="Nunito Sans"/>
               </a:rPr>
-              <a:t>Evitar:</a:t>
+              <a:t>«Si un chico llora o pide ayuda, es débil»</a:t>
+            </a:r>
+          </a:p>
+          <a:p>
+            <a:pPr>
+              <a:spcAft>
+                <a:spcPts val="1260"/>
+              </a:spcAft>
+            </a:pPr>
+            <a:r>
+              <a:rPr sz="2800" b="1">
+                <a:solidFill>
+                  <a:srgbClr val="E8793A"/>
+                </a:solidFill>
+                <a:latin typeface="Nunito Sans"/>
+              </a:rPr>
+              <a:t>• </a:t>
             </a:r>
             <a:r>
               <a:rPr sz="2800" b="0">
@@ -7363,7 +8029,25 @@
                 </a:solidFill>
                 <a:latin typeface="Nunito Sans"/>
               </a:rPr>
-              <a:t> hago como si no pasara nada.</a:t>
+              <a:t>Son </a:t>
+            </a:r>
+            <a:r>
+              <a:rPr sz="2800" b="1">
+                <a:solidFill>
+                  <a:srgbClr val="1F2A44"/>
+                </a:solidFill>
+                <a:latin typeface="Nunito Sans"/>
+              </a:rPr>
+              <a:t>estereotipos</a:t>
+            </a:r>
+            <a:r>
+              <a:rPr sz="2800" b="0">
+                <a:solidFill>
+                  <a:srgbClr val="1F2A44"/>
+                </a:solidFill>
+                <a:latin typeface="Nunito Sans"/>
+              </a:rPr>
+              <a:t> (sesión 46): no describen a las personas reales</a:t>
             </a:r>
           </a:p>
           <a:p>
@@ -7382,124 +8066,13 @@
               <a:t>• </a:t>
             </a:r>
             <a:r>
-              <a:rPr sz="2800" b="1">
+              <a:rPr sz="2800" b="0">
                 <a:solidFill>
                   <a:srgbClr val="1F2A44"/>
                 </a:solidFill>
                 <a:latin typeface="Nunito Sans"/>
               </a:rPr>
-              <a:t>Ceder:</a:t>
-            </a:r>
-            <a:r>
-              <a:rPr sz="2800" b="0">
-                <a:solidFill>
-                  <a:srgbClr val="1F2A44"/>
-                </a:solidFill>
-                <a:latin typeface="Nunito Sans"/>
-              </a:rPr>
-              <a:t> dejo que el otro consiga lo suyo.</a:t>
-            </a:r>
-          </a:p>
-          <a:p>
-            <a:pPr>
-              <a:spcAft>
-                <a:spcPts val="1260"/>
-              </a:spcAft>
-            </a:pPr>
-            <a:r>
-              <a:rPr sz="2800" b="1">
-                <a:solidFill>
-                  <a:srgbClr val="E8793A"/>
-                </a:solidFill>
-                <a:latin typeface="Nunito Sans"/>
-              </a:rPr>
-              <a:t>• </a:t>
-            </a:r>
-            <a:r>
-              <a:rPr sz="2800" b="1">
-                <a:solidFill>
-                  <a:srgbClr val="1F2A44"/>
-                </a:solidFill>
-                <a:latin typeface="Nunito Sans"/>
-              </a:rPr>
-              <a:t>Competir:</a:t>
-            </a:r>
-            <a:r>
-              <a:rPr sz="2800" b="0">
-                <a:solidFill>
-                  <a:srgbClr val="1F2A44"/>
-                </a:solidFill>
-                <a:latin typeface="Nunito Sans"/>
-              </a:rPr>
-              <a:t> intento ganar yo, aunque el otro pierda.</a:t>
-            </a:r>
-          </a:p>
-          <a:p>
-            <a:pPr>
-              <a:spcAft>
-                <a:spcPts val="1260"/>
-              </a:spcAft>
-            </a:pPr>
-            <a:r>
-              <a:rPr sz="2800" b="1">
-                <a:solidFill>
-                  <a:srgbClr val="E8793A"/>
-                </a:solidFill>
-                <a:latin typeface="Nunito Sans"/>
-              </a:rPr>
-              <a:t>• </a:t>
-            </a:r>
-            <a:r>
-              <a:rPr sz="2800" b="1">
-                <a:solidFill>
-                  <a:srgbClr val="1F2A44"/>
-                </a:solidFill>
-                <a:latin typeface="Nunito Sans"/>
-              </a:rPr>
-              <a:t>Pactar:</a:t>
-            </a:r>
-            <a:r>
-              <a:rPr sz="2800" b="0">
-                <a:solidFill>
-                  <a:srgbClr val="1F2A44"/>
-                </a:solidFill>
-                <a:latin typeface="Nunito Sans"/>
-              </a:rPr>
-              <a:t> cada uno renuncia a una parte.</a:t>
-            </a:r>
-          </a:p>
-          <a:p>
-            <a:pPr>
-              <a:spcAft>
-                <a:spcPts val="1260"/>
-              </a:spcAft>
-            </a:pPr>
-            <a:r>
-              <a:rPr sz="2800" b="1">
-                <a:solidFill>
-                  <a:srgbClr val="E8793A"/>
-                </a:solidFill>
-                <a:latin typeface="Nunito Sans"/>
-              </a:rPr>
-              <a:t>• </a:t>
-            </a:r>
-            <a:r>
-              <a:rPr sz="2800" b="1">
-                <a:solidFill>
-                  <a:srgbClr val="1F2A44"/>
-                </a:solidFill>
-                <a:latin typeface="Nunito Sans"/>
-              </a:rPr>
-              <a:t>Colaborar:</a:t>
-            </a:r>
-            <a:r>
-              <a:rPr sz="2800" b="0">
-                <a:solidFill>
-                  <a:srgbClr val="1F2A44"/>
-                </a:solidFill>
-                <a:latin typeface="Nunito Sans"/>
-              </a:rPr>
-              <a:t> buscamos juntos una salida buena para los dos.</a:t>
+              <a:t>Hay muchas formas de relación, y no tener pareja también es una opción</a:t>
             </a:r>
           </a:p>
         </p:txBody>
@@ -7564,7 +8137,7 @@
                 </a:solidFill>
                 <a:latin typeface="Nunito Sans"/>
               </a:rPr>
-              <a:t>BLOQUE 1 · QUÉ ES UN CONFLICTO</a:t>
+              <a:t>BLOQUE 1 · MITOS, ROLES Y CONTROL</a:t>
             </a:r>
           </a:p>
         </p:txBody>
@@ -7603,7 +8176,7 @@
                 </a:solidFill>
                 <a:latin typeface="Fredoka"/>
               </a:rPr>
-              <a:t>Postura e interés</a:t>
+              <a:t>Control disfrazado de cariño</a:t>
             </a:r>
           </a:p>
         </p:txBody>
@@ -7685,7 +8258,25 @@
                 </a:solidFill>
                 <a:latin typeface="Nunito Sans"/>
               </a:rPr>
-              <a:t>La postura es lo que pido. El interés es lo que necesito de verdad, la razón por la que lo pido.</a:t>
+              <a:t>Es </a:t>
+            </a:r>
+            <a:r>
+              <a:rPr sz="2800" b="1">
+                <a:solidFill>
+                  <a:srgbClr val="1F2A44"/>
+                </a:solidFill>
+                <a:latin typeface="Nunito Sans"/>
+              </a:rPr>
+              <a:t>control</a:t>
+            </a:r>
+            <a:r>
+              <a:rPr sz="2800" b="1">
+                <a:solidFill>
+                  <a:srgbClr val="1F2A44"/>
+                </a:solidFill>
+                <a:latin typeface="Nunito Sans"/>
+              </a:rPr>
+              <a:t> cuando alguien vigila o limita a su pareja y lo presenta como amor o preocupación.</a:t>
             </a:r>
           </a:p>
         </p:txBody>
@@ -7733,16 +8324,48 @@
                 </a:solidFill>
                 <a:latin typeface="Nunito Sans"/>
               </a:rPr>
-              <a:t>Las </a:t>
-            </a:r>
+              <a:t>Pedir la ubicación o «¿con quién estás?» a todas horas</a:t>
+            </a:r>
+          </a:p>
+          <a:p>
+            <a:pPr>
+              <a:spcAft>
+                <a:spcPts val="1260"/>
+              </a:spcAft>
+            </a:pPr>
             <a:r>
               <a:rPr sz="2800" b="1">
                 <a:solidFill>
+                  <a:srgbClr val="E8793A"/>
+                </a:solidFill>
+                <a:latin typeface="Nunito Sans"/>
+              </a:rPr>
+              <a:t>• </a:t>
+            </a:r>
+            <a:r>
+              <a:rPr sz="2800" b="0">
+                <a:solidFill>
                   <a:srgbClr val="1F2A44"/>
                 </a:solidFill>
                 <a:latin typeface="Nunito Sans"/>
               </a:rPr>
-              <a:t>posturas</a:t>
+              <a:t>Decidir con quién quedas o qué ropa llevas</a:t>
+            </a:r>
+          </a:p>
+          <a:p>
+            <a:pPr>
+              <a:spcAft>
+                <a:spcPts val="1260"/>
+              </a:spcAft>
+            </a:pPr>
+            <a:r>
+              <a:rPr sz="2800" b="1">
+                <a:solidFill>
+                  <a:srgbClr val="E8793A"/>
+                </a:solidFill>
+                <a:latin typeface="Nunito Sans"/>
+              </a:rPr>
+              <a:t>• </a:t>
             </a:r>
             <a:r>
               <a:rPr sz="2800" b="0">
@@ -7751,7 +8374,7 @@
                 </a:solidFill>
                 <a:latin typeface="Nunito Sans"/>
               </a:rPr>
-              <a:t> chocan más que los intereses</a:t>
+              <a:t>Pedir contraseñas o revisar el móvil</a:t>
             </a:r>
           </a:p>
           <a:p>
@@ -7776,32 +8399,7 @@
                 </a:solidFill>
                 <a:latin typeface="Nunito Sans"/>
               </a:rPr>
-              <a:t>Pregunta clave: «¿Para qué lo quieres?»</a:t>
-            </a:r>
-          </a:p>
-          <a:p>
-            <a:pPr>
-              <a:spcAft>
-                <a:spcPts val="1260"/>
-              </a:spcAft>
-            </a:pPr>
-            <a:r>
-              <a:rPr sz="2800" b="1">
-                <a:solidFill>
-                  <a:srgbClr val="E8793A"/>
-                </a:solidFill>
-                <a:latin typeface="Nunito Sans"/>
-              </a:rPr>
-              <a:t>• </a:t>
-            </a:r>
-            <a:r>
-              <a:rPr sz="2800" b="0">
-                <a:solidFill>
-                  <a:srgbClr val="1F2A44"/>
-                </a:solidFill>
-                <a:latin typeface="Nunito Sans"/>
-              </a:rPr>
-              <a:t>Idea de Roger Fisher y William Ury (Harvard, 1981)</a:t>
+              <a:t>Enfadarse si no contestas enseguida</a:t>
             </a:r>
           </a:p>
         </p:txBody>
